--- a/PPTX/DNA_Replication_Complete_Lecture.pptx
+++ b/PPTX/DNA_Replication_Complete_Lecture.pptx
@@ -6127,8 +6127,8 @@
         </p:nvSpPr>
         <p:spPr>
           <a:xfrm>
-            <a:off x="609600" y="1714500"/>
-            <a:ext cx="10972800" cy="3429000"/>
+            <a:off x="609600" y="1234440"/>
+            <a:ext cx="10972800" cy="4389120"/>
           </a:xfrm>
           <a:prstGeom prst="rect">
             <a:avLst/>
@@ -6146,28 +6146,90 @@
               <a:buNone/>
             </a:pPr>
             <a:r>
-              <a:rPr lang="en-US" sz="3600" b="1" dirty="0">
+              <a:rPr lang="en-US" sz="3400" b="1" dirty="0">
                 <a:solidFill>
                   <a:srgbClr val="FFFFFF"/>
                 </a:solidFill>
               </a:rPr>
               <a:t>DNA Replication in Prokaryotes and Eukaryotes</a:t>
             </a:r>
-            <a:endParaRPr lang="en-US" sz="3600" dirty="0"/>
+            <a:endParaRPr lang="en-US" sz="3400" dirty="0"/>
           </a:p>
           <a:p>
             <a:pPr algn="ctr" indent="0" marL="0">
               <a:buNone/>
             </a:pPr>
             <a:r>
-              <a:rPr lang="en-US" sz="1800" i="1" dirty="0">
+              <a:rPr lang="en-US" sz="1700" i="1" dirty="0">
                 <a:solidFill>
                   <a:srgbClr val="ECF0F1"/>
                 </a:solidFill>
               </a:rPr>
               <a:t>Complete Molecular Biology Teaching Module</a:t>
             </a:r>
-            <a:endParaRPr lang="en-US" sz="3600" dirty="0"/>
+            <a:endParaRPr lang="en-US" sz="3400" dirty="0"/>
+          </a:p>
+          <a:p>
+            <a:pPr algn="ctr" indent="0" marL="0">
+              <a:buNone/>
+            </a:pPr>
+            <a:endParaRPr lang="en-US" sz="3400" dirty="0"/>
+          </a:p>
+          <a:p>
+            <a:pPr algn="ctr" indent="0" marL="0">
+              <a:buNone/>
+            </a:pPr>
+            <a:r>
+              <a:rPr lang="en-US" sz="2000" b="1" dirty="0">
+                <a:solidFill>
+                  <a:srgbClr val="FFFFFF"/>
+                </a:solidFill>
+              </a:rPr>
+              <a:t>Dr. Saira Azam</a:t>
+            </a:r>
+            <a:endParaRPr lang="en-US" sz="3400" dirty="0"/>
+          </a:p>
+          <a:p>
+            <a:pPr algn="ctr" indent="0" marL="0">
+              <a:buNone/>
+            </a:pPr>
+            <a:r>
+              <a:rPr lang="en-US" sz="1400" dirty="0">
+                <a:solidFill>
+                  <a:srgbClr val="ECF0F1"/>
+                </a:solidFill>
+              </a:rPr>
+              <a:t>Assistant Professor</a:t>
+            </a:r>
+            <a:endParaRPr lang="en-US" sz="3400" dirty="0"/>
+          </a:p>
+          <a:p>
+            <a:pPr algn="ctr" indent="0" marL="0">
+              <a:buNone/>
+            </a:pPr>
+            <a:r>
+              <a:rPr lang="en-US" sz="1300" dirty="0">
+                <a:solidFill>
+                  <a:srgbClr val="ECF0F1"/>
+                </a:solidFill>
+              </a:rPr>
+              <a:t>Centre of Excellence in Molecular Biology</a:t>
+            </a:r>
+            <a:endParaRPr lang="en-US" sz="3400" dirty="0"/>
+          </a:p>
+          <a:p>
+            <a:pPr algn="ctr" indent="0" marL="0">
+              <a:buNone/>
+            </a:pPr>
+            <a:r>
+              <a:rPr lang="en-US" sz="1300" dirty="0">
+                <a:solidFill>
+                  <a:srgbClr val="ECF0F1"/>
+                </a:solidFill>
+              </a:rPr>
+              <a:t>University of the Punjab, Lahore</a:t>
+            </a:r>
+            <a:endParaRPr lang="en-US" sz="3400" dirty="0"/>
           </a:p>
         </p:txBody>
       </p:sp>
